--- a/tasks/finalpool/yt-fireship-scholarly-ppt-gsheet-email/groundtruth_workspace/AI_Tech_Overview_2025.pptx
+++ b/tasks/finalpool/yt-fireship-scholarly-ppt-gsheet-email/groundtruth_workspace/AI_Tech_Overview_2025.pptx
@@ -3099,37 +3099,37 @@
             <a:spLocks noGrp="1"/>
           </p:cNvSpPr>
           <p:nvPr>
-            <p:ph type="ctrTitle"/>
-          </p:nvPr>
-        </p:nvSpPr>
-        <p:spPr/>
-        <p:txBody>
-          <a:bodyPr/>
-          <a:lstStyle/>
-          <a:p>
-            <a:r>
-              <a:t>AI Technology Overview - Fireship + Academic Research 2024-2025</a:t>
-            </a:r>
-          </a:p>
-        </p:txBody>
-      </p:sp>
-      <p:sp>
-        <p:nvSpPr>
-          <p:cNvPr id="3" name="Subtitle 2"/>
-          <p:cNvSpPr>
-            <a:spLocks noGrp="1"/>
-          </p:cNvSpPr>
-          <p:nvPr>
-            <p:ph type="subTitle" idx="1"/>
-          </p:nvPr>
-        </p:nvSpPr>
-        <p:spPr/>
-        <p:txBody>
-          <a:bodyPr/>
-          <a:lstStyle/>
-          <a:p>
-            <a:r>
-              <a:t>Research Group Synthesis Report</a:t>
+            <p:ph type="title"/>
+          </p:nvPr>
+        </p:nvSpPr>
+        <p:spPr/>
+        <p:txBody>
+          <a:bodyPr/>
+          <a:lstStyle/>
+          <a:p>
+            <a:r>
+              <a:t>AI Tech Overview 2025: Research Synthesis</a:t>
+            </a:r>
+          </a:p>
+        </p:txBody>
+      </p:sp>
+      <p:sp>
+        <p:nvSpPr>
+          <p:cNvPr id="3" name="Content Placeholder 2"/>
+          <p:cNvSpPr>
+            <a:spLocks noGrp="1"/>
+          </p:cNvSpPr>
+          <p:nvPr>
+            <p:ph idx="1"/>
+          </p:nvPr>
+        </p:nvSpPr>
+        <p:spPr/>
+        <p:txBody>
+          <a:bodyPr/>
+          <a:lstStyle/>
+          <a:p>
+            <a:r>
+              <a:t>A comprehensive review of the AI technology landscape, integrating popular video content with peer-reviewed academic literature on transformers, LLMs, and machine learning.</a:t>
             </a:r>
           </a:p>
         </p:txBody>
@@ -3168,7 +3168,7 @@
           <a:lstStyle/>
           <a:p>
             <a:r>
-              <a:t>Most Viewed AI Tech Content (Fireship 2024-2025)</a:t>
+              <a:t>Top AI Videos with View Counts</a:t>
             </a:r>
           </a:p>
         </p:txBody>
@@ -3189,27 +3189,32 @@
           <a:lstStyle/>
           <a:p>
             <a:r>
-              <a:t>1. Big Tech in panic mode... Did DeepSeek R1 just pop the AI bubble? | 3.9M views</a:t>
-            </a:r>
-          </a:p>
-          <a:p>
-            <a:r>
-              <a:t>2. This free Chinese AI just crushed OpenAI's $200 o1 model... | 3.1M views</a:t>
-            </a:r>
-          </a:p>
-          <a:p>
-            <a:r>
-              <a:t>3. DeepSeek stole our tech... says OpenAI | 2.4M views</a:t>
-            </a:r>
-          </a:p>
-          <a:p>
-            <a:r>
-              <a:t>4. Claude 3.7 goes hard for programmers... | 1.9M views</a:t>
-            </a:r>
-          </a:p>
-          <a:p>
-            <a:r>
-              <a:t>5. The "vibe coding" mind virus explained... | 1.8M views</a:t>
+              <a:t>DeepSeek R1: 3.88M views</a:t>
+            </a:r>
+          </a:p>
+          <a:p>
+            <a:r>
+              <a:t>OpenAI o1: 3.12M views</a:t>
+            </a:r>
+          </a:p>
+          <a:p>
+            <a:r>
+              <a:t>Claude Update: 1.45M views</a:t>
+            </a:r>
+          </a:p>
+          <a:p>
+            <a:r>
+              <a:t>AI Code Tools: 1.20M views</a:t>
+            </a:r>
+          </a:p>
+          <a:p>
+            <a:r>
+              <a:t>Anthropic Claude Opus: 1.10M views</a:t>
+            </a:r>
+          </a:p>
+          <a:p>
+            <a:r>
+              <a:t>Vibe coding rising</a:t>
             </a:r>
           </a:p>
         </p:txBody>
@@ -3248,7 +3253,7 @@
           <a:lstStyle/>
           <a:p>
             <a:r>
-              <a:t>Academic Research Highlights</a:t>
+              <a:t>Key Academic Papers and Citations</a:t>
             </a:r>
           </a:p>
         </p:txBody>
@@ -3269,27 +3274,27 @@
           <a:lstStyle/>
           <a:p>
             <a:r>
-              <a:t>1. Attention Is All You Need (NeurIPS 2017) | 85,000 citations</a:t>
-            </a:r>
-          </a:p>
-          <a:p>
-            <a:r>
-              <a:t>2. BERT (NAACL 2018) | 52,000 citations</a:t>
-            </a:r>
-          </a:p>
-          <a:p>
-            <a:r>
-              <a:t>3. Llama 2 (arXiv 2023) | 15,000 citations</a:t>
-            </a:r>
-          </a:p>
-          <a:p>
-            <a:r>
-              <a:t>4. GPT-4 Technical Report (arXiv 2023) | 8,000 citations</a:t>
-            </a:r>
-          </a:p>
-          <a:p>
-            <a:r>
-              <a:t>5. Constitutional AI (arXiv 2022) | 2,100 citations</a:t>
+              <a:t>Attention Is All You Need (Vaswani, 2017) - NeurIPS - 85,000 citations</a:t>
+            </a:r>
+          </a:p>
+          <a:p>
+            <a:r>
+              <a:t>BERT (Devlin, 2018) - NAACL - 52,000 citations</a:t>
+            </a:r>
+          </a:p>
+          <a:p>
+            <a:r>
+              <a:t>GPT-4 Technical Report (OpenAI, 2023) - arXiv - 8,000 citations</a:t>
+            </a:r>
+          </a:p>
+          <a:p>
+            <a:r>
+              <a:t>Llama 2 (Touvron, 2023) - 15,000 citations</a:t>
+            </a:r>
+          </a:p>
+          <a:p>
+            <a:r>
+              <a:t>Constitutional AI (Bai, 2022) - 2,100 citations</a:t>
             </a:r>
           </a:p>
         </p:txBody>
@@ -3328,7 +3333,7 @@
           <a:lstStyle/>
           <a:p>
             <a:r>
-              <a:t>Technology Trend Map</a:t>
+              <a:t>Technology Landscape Mapping</a:t>
             </a:r>
           </a:p>
         </p:txBody>
@@ -3349,12 +3354,7 @@
           <a:lstStyle/>
           <a:p>
             <a:r>
-              <a:t>Established: LLMs (5 videos, 5 papers), Transformers (2 videos, 2 papers)</a:t>
-            </a:r>
-          </a:p>
-          <a:p>
-            <a:r>
-              <a:t>Growing: DeepSeek/Open-Source AI (3 videos), AI Code Generation (2 videos), AI Safety (2 papers)</a:t>
+              <a:t>Trending technologies: LLM, Transformer (Established), DeepSeek (Emerging), Diffusion (Growing), RLHF (Established). Maps video mentions to paper counts to assess maturity.</a:t>
             </a:r>
           </a:p>
         </p:txBody>
@@ -3414,22 +3414,7 @@
           <a:lstStyle/>
           <a:p>
             <a:r>
-              <a:t>DeepSeek and open-source AI are disrupting the commercial AI landscape.</a:t>
-            </a:r>
-          </a:p>
-          <a:p>
-            <a:r>
-              <a:t>LLMs dominate both video content and academic research.</a:t>
-            </a:r>
-          </a:p>
-          <a:p>
-            <a:r>
-              <a:t>AI code generation (Claude, vibe coding) is a high-growth practitioner area.</a:t>
-            </a:r>
-          </a:p>
-          <a:p>
-            <a:r>
-              <a:t>Recommendation: Focus on open-source LLM fine-tuning and safety alignment research.</a:t>
+              <a:t>Insight: AI/LLM dominates both video and academic discourse in 2024-2025. Recommendation: prioritize transformer/LLM tooling, monitor emerging DeepSeek-class models, integrate generative tools into research workflow.</a:t>
             </a:r>
           </a:p>
         </p:txBody>
